--- a/entregaveis_trabalho/Apresentação Executiva Wine Classification Vitivinícola.pptx
+++ b/entregaveis_trabalho/Apresentação Executiva Wine Classification Vitivinícola.pptx
@@ -8,14 +8,15 @@
     <p:sldId id="256" r:id="rId2"/>
     <p:sldId id="257" r:id="rId3"/>
     <p:sldId id="258" r:id="rId4"/>
-    <p:sldId id="260" r:id="rId5"/>
-    <p:sldId id="262" r:id="rId6"/>
-    <p:sldId id="263" r:id="rId7"/>
-    <p:sldId id="261" r:id="rId8"/>
+    <p:sldId id="261" r:id="rId5"/>
+    <p:sldId id="260" r:id="rId6"/>
+    <p:sldId id="262" r:id="rId7"/>
+    <p:sldId id="263" r:id="rId8"/>
     <p:sldId id="264" r:id="rId9"/>
     <p:sldId id="265" r:id="rId10"/>
     <p:sldId id="266" r:id="rId11"/>
     <p:sldId id="267" r:id="rId12"/>
+    <p:sldId id="268" r:id="rId13"/>
   </p:sldIdLst>
   <p:sldSz cx="12192000" cy="6858000"/>
   <p:notesSz cx="6858000" cy="9144000"/>
@@ -114,7 +115,93 @@
       </a:defRPr>
     </a:lvl9pPr>
   </p:defaultTextStyle>
+  <p:extLst>
+    <p:ext uri="{EFAFB233-063F-42B5-8137-9DF3F51BA10A}">
+      <p15:sldGuideLst xmlns:p15="http://schemas.microsoft.com/office/powerpoint/2012/main"/>
+    </p:ext>
+  </p:extLst>
 </p:presentation>
+</file>
+
+<file path=ppt/revisionInfo.xml><?xml version="1.0" encoding="utf-8"?>
+<p1510:revInfo xmlns:a="http://schemas.openxmlformats.org/drawingml/2006/main" xmlns:r="http://schemas.openxmlformats.org/officeDocument/2006/relationships" xmlns:p1510="http://schemas.microsoft.com/office/powerpoint/2015/10/main">
+  <p1510:revLst>
+    <p1510:client id="{EA9EE62C-A87E-4DE4-ABE1-1CD99A19DACA}" v="2" dt="2026-07-13T19:53:26.332"/>
+  </p1510:revLst>
+</p1510:revInfo>
+</file>
+
+<file path=ppt/changesInfos/changesInfo1.xml><?xml version="1.0" encoding="utf-8"?>
+<pc:chgInfo xmlns:a="http://schemas.openxmlformats.org/drawingml/2006/main" xmlns:r="http://schemas.openxmlformats.org/officeDocument/2006/relationships" xmlns:ac="http://schemas.microsoft.com/office/drawing/2013/main/command" xmlns:pc="http://schemas.microsoft.com/office/powerpoint/2013/main/command">
+  <pc:docChgLst>
+    <pc:chgData name="Bruno Ricardo de Oliveira" userId="0531e3f2-3777-47fd-abc2-898b945f0dc6" providerId="ADAL" clId="{ADC971AD-C15D-4114-9C7B-7AB32F0D6137}"/>
+    <pc:docChg chg="custSel addSld modSld sldOrd">
+      <pc:chgData name="Bruno Ricardo de Oliveira" userId="0531e3f2-3777-47fd-abc2-898b945f0dc6" providerId="ADAL" clId="{ADC971AD-C15D-4114-9C7B-7AB32F0D6137}" dt="2026-07-13T19:56:40.052" v="187"/>
+      <pc:docMkLst>
+        <pc:docMk/>
+      </pc:docMkLst>
+      <pc:sldChg chg="ord">
+        <pc:chgData name="Bruno Ricardo de Oliveira" userId="0531e3f2-3777-47fd-abc2-898b945f0dc6" providerId="ADAL" clId="{ADC971AD-C15D-4114-9C7B-7AB32F0D6137}" dt="2026-07-13T19:54:56.556" v="179"/>
+        <pc:sldMkLst>
+          <pc:docMk/>
+          <pc:sldMk cId="3053891418" sldId="261"/>
+        </pc:sldMkLst>
+      </pc:sldChg>
+      <pc:sldChg chg="ord">
+        <pc:chgData name="Bruno Ricardo de Oliveira" userId="0531e3f2-3777-47fd-abc2-898b945f0dc6" providerId="ADAL" clId="{ADC971AD-C15D-4114-9C7B-7AB32F0D6137}" dt="2026-07-13T19:56:08.061" v="183"/>
+        <pc:sldMkLst>
+          <pc:docMk/>
+          <pc:sldMk cId="2915968840" sldId="262"/>
+        </pc:sldMkLst>
+      </pc:sldChg>
+      <pc:sldChg chg="ord">
+        <pc:chgData name="Bruno Ricardo de Oliveira" userId="0531e3f2-3777-47fd-abc2-898b945f0dc6" providerId="ADAL" clId="{ADC971AD-C15D-4114-9C7B-7AB32F0D6137}" dt="2026-07-13T19:56:26.972" v="185"/>
+        <pc:sldMkLst>
+          <pc:docMk/>
+          <pc:sldMk cId="3001659689" sldId="263"/>
+        </pc:sldMkLst>
+      </pc:sldChg>
+      <pc:sldChg chg="ord">
+        <pc:chgData name="Bruno Ricardo de Oliveira" userId="0531e3f2-3777-47fd-abc2-898b945f0dc6" providerId="ADAL" clId="{ADC971AD-C15D-4114-9C7B-7AB32F0D6137}" dt="2026-07-13T19:56:40.052" v="187"/>
+        <pc:sldMkLst>
+          <pc:docMk/>
+          <pc:sldMk cId="2648492286" sldId="265"/>
+        </pc:sldMkLst>
+      </pc:sldChg>
+      <pc:sldChg chg="addSp delSp modSp add mod setBg">
+        <pc:chgData name="Bruno Ricardo de Oliveira" userId="0531e3f2-3777-47fd-abc2-898b945f0dc6" providerId="ADAL" clId="{ADC971AD-C15D-4114-9C7B-7AB32F0D6137}" dt="2026-07-13T19:53:30.664" v="173" actId="20577"/>
+        <pc:sldMkLst>
+          <pc:docMk/>
+          <pc:sldMk cId="1261097953" sldId="268"/>
+        </pc:sldMkLst>
+        <pc:spChg chg="del">
+          <ac:chgData name="Bruno Ricardo de Oliveira" userId="0531e3f2-3777-47fd-abc2-898b945f0dc6" providerId="ADAL" clId="{ADC971AD-C15D-4114-9C7B-7AB32F0D6137}" dt="2026-07-13T19:52:46.214" v="53" actId="478"/>
+          <ac:spMkLst>
+            <pc:docMk/>
+            <pc:sldMk cId="1261097953" sldId="268"/>
+            <ac:spMk id="3" creationId="{F8899BAB-270B-75C6-B42D-3970723BFEC4}"/>
+          </ac:spMkLst>
+        </pc:spChg>
+        <pc:spChg chg="add del mod">
+          <ac:chgData name="Bruno Ricardo de Oliveira" userId="0531e3f2-3777-47fd-abc2-898b945f0dc6" providerId="ADAL" clId="{ADC971AD-C15D-4114-9C7B-7AB32F0D6137}" dt="2026-07-13T19:52:47.972" v="54" actId="478"/>
+          <ac:spMkLst>
+            <pc:docMk/>
+            <pc:sldMk cId="1261097953" sldId="268"/>
+            <ac:spMk id="4" creationId="{87011869-970C-A022-3A47-B3E12C6738F1}"/>
+          </ac:spMkLst>
+        </pc:spChg>
+        <pc:spChg chg="mod">
+          <ac:chgData name="Bruno Ricardo de Oliveira" userId="0531e3f2-3777-47fd-abc2-898b945f0dc6" providerId="ADAL" clId="{ADC971AD-C15D-4114-9C7B-7AB32F0D6137}" dt="2026-07-13T19:53:30.664" v="173" actId="20577"/>
+          <ac:spMkLst>
+            <pc:docMk/>
+            <pc:sldMk cId="1261097953" sldId="268"/>
+            <ac:spMk id="19" creationId="{51176DE2-CC5A-FEAD-6B22-2A8C547C971A}"/>
+          </ac:spMkLst>
+        </pc:spChg>
+      </pc:sldChg>
+    </pc:docChg>
+  </pc:docChgLst>
+</pc:chgInfo>
 </file>
 
 <file path=ppt/diagrams/colors1.xml><?xml version="1.0" encoding="utf-8"?>
@@ -3317,7 +3404,7 @@
           <a:p>
             <a:fld id="{E31BA835-12AC-4E8F-955A-EA3F4DE2791F}" type="datetime1">
               <a:rPr lang="en-US" smtClean="0"/>
-              <a:t>7/9/2026</a:t>
+              <a:t>7/13/2026</a:t>
             </a:fld>
             <a:endParaRPr lang="en-US"/>
           </a:p>
@@ -3488,7 +3575,7 @@
           <a:p>
             <a:fld id="{E31BA835-12AC-4E8F-955A-EA3F4DE2791F}" type="datetime1">
               <a:rPr lang="en-US" smtClean="0"/>
-              <a:t>7/9/2026</a:t>
+              <a:t>7/13/2026</a:t>
             </a:fld>
             <a:endParaRPr lang="en-US"/>
           </a:p>
@@ -3669,7 +3756,7 @@
           <a:p>
             <a:fld id="{E31BA835-12AC-4E8F-955A-EA3F4DE2791F}" type="datetime1">
               <a:rPr lang="en-US" smtClean="0"/>
-              <a:t>7/9/2026</a:t>
+              <a:t>7/13/2026</a:t>
             </a:fld>
             <a:endParaRPr lang="en-US"/>
           </a:p>
@@ -3840,7 +3927,7 @@
           <a:p>
             <a:fld id="{E31BA835-12AC-4E8F-955A-EA3F4DE2791F}" type="datetime1">
               <a:rPr lang="en-US" smtClean="0"/>
-              <a:t>7/9/2026</a:t>
+              <a:t>7/13/2026</a:t>
             </a:fld>
             <a:endParaRPr lang="en-US"/>
           </a:p>
@@ -4109,7 +4196,7 @@
           <a:p>
             <a:fld id="{E31BA835-12AC-4E8F-955A-EA3F4DE2791F}" type="datetime1">
               <a:rPr lang="en-US" smtClean="0"/>
-              <a:t>7/9/2026</a:t>
+              <a:t>7/13/2026</a:t>
             </a:fld>
             <a:endParaRPr lang="en-US"/>
           </a:p>
@@ -4342,7 +4429,7 @@
           <a:p>
             <a:fld id="{E31BA835-12AC-4E8F-955A-EA3F4DE2791F}" type="datetime1">
               <a:rPr lang="en-US" smtClean="0"/>
-              <a:t>7/9/2026</a:t>
+              <a:t>7/13/2026</a:t>
             </a:fld>
             <a:endParaRPr lang="en-US"/>
           </a:p>
@@ -4702,7 +4789,7 @@
           <a:p>
             <a:fld id="{E31BA835-12AC-4E8F-955A-EA3F4DE2791F}" type="datetime1">
               <a:rPr lang="en-US" smtClean="0"/>
-              <a:t>7/9/2026</a:t>
+              <a:t>7/13/2026</a:t>
             </a:fld>
             <a:endParaRPr lang="en-US"/>
           </a:p>
@@ -4844,7 +4931,7 @@
           <a:p>
             <a:fld id="{E31BA835-12AC-4E8F-955A-EA3F4DE2791F}" type="datetime1">
               <a:rPr lang="en-US" smtClean="0"/>
-              <a:t>7/9/2026</a:t>
+              <a:t>7/13/2026</a:t>
             </a:fld>
             <a:endParaRPr lang="en-US"/>
           </a:p>
@@ -4940,7 +5027,7 @@
           <a:p>
             <a:fld id="{E31BA835-12AC-4E8F-955A-EA3F4DE2791F}" type="datetime1">
               <a:rPr lang="en-US" smtClean="0"/>
-              <a:t>7/9/2026</a:t>
+              <a:t>7/13/2026</a:t>
             </a:fld>
             <a:endParaRPr lang="en-US"/>
           </a:p>
@@ -5305,7 +5392,7 @@
           <a:p>
             <a:fld id="{E31BA835-12AC-4E8F-955A-EA3F4DE2791F}" type="datetime1">
               <a:rPr lang="en-US" smtClean="0"/>
-              <a:t>7/9/2026</a:t>
+              <a:t>7/13/2026</a:t>
             </a:fld>
             <a:endParaRPr lang="en-US"/>
           </a:p>
@@ -5670,7 +5757,7 @@
           <a:p>
             <a:fld id="{E31BA835-12AC-4E8F-955A-EA3F4DE2791F}" type="datetime1">
               <a:rPr lang="en-US" smtClean="0"/>
-              <a:t>7/9/2026</a:t>
+              <a:t>7/13/2026</a:t>
             </a:fld>
             <a:endParaRPr lang="en-US"/>
           </a:p>
@@ -5913,7 +6000,7 @@
           <a:p>
             <a:fld id="{E31BA835-12AC-4E8F-955A-EA3F4DE2791F}" type="datetime1">
               <a:rPr lang="en-US" smtClean="0"/>
-              <a:t>7/9/2026</a:t>
+              <a:t>7/13/2026</a:t>
             </a:fld>
             <a:endParaRPr lang="en-US"/>
           </a:p>
@@ -6884,6 +6971,204 @@
 </p:sld>
 </file>
 
+<file path=ppt/slides/slide12.xml><?xml version="1.0" encoding="utf-8"?>
+<p:sld xmlns:a="http://schemas.openxmlformats.org/drawingml/2006/main" xmlns:r="http://schemas.openxmlformats.org/officeDocument/2006/relationships" xmlns:p="http://schemas.openxmlformats.org/presentationml/2006/main">
+  <p:cSld>
+    <p:spTree>
+      <p:nvGrpSpPr>
+        <p:cNvPr id="1" name="">
+          <a:extLst>
+            <a:ext uri="{FF2B5EF4-FFF2-40B4-BE49-F238E27FC236}">
+              <a16:creationId xmlns:a16="http://schemas.microsoft.com/office/drawing/2014/main" id="{A5BBF532-8255-9E8F-C150-61AFCC1E0FBA}"/>
+            </a:ext>
+          </a:extLst>
+        </p:cNvPr>
+        <p:cNvGrpSpPr/>
+        <p:nvPr/>
+      </p:nvGrpSpPr>
+      <p:grpSpPr>
+        <a:xfrm>
+          <a:off x="0" y="0"/>
+          <a:ext cx="0" cy="0"/>
+          <a:chOff x="0" y="0"/>
+          <a:chExt cx="0" cy="0"/>
+        </a:xfrm>
+      </p:grpSpPr>
+      <p:pic>
+        <p:nvPicPr>
+          <p:cNvPr id="16" name="Picture 3">
+            <a:extLst>
+              <a:ext uri="{FF2B5EF4-FFF2-40B4-BE49-F238E27FC236}">
+                <a16:creationId xmlns:a16="http://schemas.microsoft.com/office/drawing/2014/main" id="{69CDE428-4C1B-DA64-5759-96B71C2F1244}"/>
+              </a:ext>
+            </a:extLst>
+          </p:cNvPr>
+          <p:cNvPicPr>
+            <a:picLocks noChangeAspect="1"/>
+          </p:cNvPicPr>
+          <p:nvPr/>
+        </p:nvPicPr>
+        <p:blipFill>
+          <a:blip r:embed="rId2"/>
+          <a:srcRect t="15413"/>
+          <a:stretch>
+            <a:fillRect/>
+          </a:stretch>
+        </p:blipFill>
+        <p:spPr>
+          <a:xfrm>
+            <a:off x="20" y="10"/>
+            <a:ext cx="12191980" cy="6857990"/>
+          </a:xfrm>
+          <a:prstGeom prst="rect">
+            <a:avLst/>
+          </a:prstGeom>
+        </p:spPr>
+      </p:pic>
+      <p:sp>
+        <p:nvSpPr>
+          <p:cNvPr id="18" name="CaixaDeTexto 17">
+            <a:extLst>
+              <a:ext uri="{FF2B5EF4-FFF2-40B4-BE49-F238E27FC236}">
+                <a16:creationId xmlns:a16="http://schemas.microsoft.com/office/drawing/2014/main" id="{FFBFE351-51BB-A695-2EAE-97DFB7C4258C}"/>
+              </a:ext>
+            </a:extLst>
+          </p:cNvPr>
+          <p:cNvSpPr txBox="1"/>
+          <p:nvPr/>
+        </p:nvSpPr>
+        <p:spPr>
+          <a:xfrm>
+            <a:off x="320040" y="693554"/>
+            <a:ext cx="9628632" cy="1569660"/>
+          </a:xfrm>
+          <a:prstGeom prst="rect">
+            <a:avLst/>
+          </a:prstGeom>
+          <a:noFill/>
+        </p:spPr>
+        <p:txBody>
+          <a:bodyPr wrap="square">
+            <a:spAutoFit/>
+          </a:bodyPr>
+          <a:lstStyle/>
+          <a:p>
+            <a:r>
+              <a:rPr lang="pt-BR" sz="4800" b="1" dirty="0">
+                <a:solidFill>
+                  <a:schemeClr val="tx1"/>
+                </a:solidFill>
+              </a:rPr>
+              <a:t>Prevendo a Qualidade</a:t>
+            </a:r>
+            <a:br>
+              <a:rPr lang="pt-BR" sz="4800" b="1" dirty="0">
+                <a:solidFill>
+                  <a:schemeClr val="tx1"/>
+                </a:solidFill>
+              </a:rPr>
+            </a:br>
+            <a:r>
+              <a:rPr lang="pt-BR" sz="4800" b="1" dirty="0">
+                <a:solidFill>
+                  <a:schemeClr val="tx1"/>
+                </a:solidFill>
+              </a:rPr>
+              <a:t>de Vinhos com Dados</a:t>
+            </a:r>
+            <a:endParaRPr lang="pt-BR" sz="4800" dirty="0"/>
+          </a:p>
+        </p:txBody>
+      </p:sp>
+      <p:sp>
+        <p:nvSpPr>
+          <p:cNvPr id="19" name="CaixaDeTexto 18">
+            <a:extLst>
+              <a:ext uri="{FF2B5EF4-FFF2-40B4-BE49-F238E27FC236}">
+                <a16:creationId xmlns:a16="http://schemas.microsoft.com/office/drawing/2014/main" id="{51176DE2-CC5A-FEAD-6B22-2A8C547C971A}"/>
+              </a:ext>
+            </a:extLst>
+          </p:cNvPr>
+          <p:cNvSpPr txBox="1"/>
+          <p:nvPr/>
+        </p:nvSpPr>
+        <p:spPr>
+          <a:xfrm>
+            <a:off x="320040" y="2738577"/>
+            <a:ext cx="9628632" cy="3416320"/>
+          </a:xfrm>
+          <a:prstGeom prst="rect">
+            <a:avLst/>
+          </a:prstGeom>
+          <a:noFill/>
+        </p:spPr>
+        <p:txBody>
+          <a:bodyPr wrap="square">
+            <a:spAutoFit/>
+          </a:bodyPr>
+          <a:lstStyle/>
+          <a:p>
+            <a:r>
+              <a:rPr lang="pt-BR" sz="2400" b="1" dirty="0">
+                <a:solidFill>
+                  <a:schemeClr val="tx1"/>
+                </a:solidFill>
+              </a:rPr>
+              <a:t>Obrigado!</a:t>
+            </a:r>
+          </a:p>
+          <a:p>
+            <a:endParaRPr lang="pt-BR" sz="2400" b="1" dirty="0"/>
+          </a:p>
+          <a:p>
+            <a:endParaRPr lang="pt-BR" sz="2400" b="1" dirty="0"/>
+          </a:p>
+          <a:p>
+            <a:endParaRPr lang="pt-BR" sz="2400" b="1" dirty="0"/>
+          </a:p>
+          <a:p>
+            <a:r>
+              <a:rPr lang="pt-BR" sz="2400" b="1" dirty="0"/>
+              <a:t>Dúvidas estou à disposição.</a:t>
+            </a:r>
+          </a:p>
+          <a:p>
+            <a:endParaRPr lang="pt-BR" sz="2400" b="1" dirty="0"/>
+          </a:p>
+          <a:p>
+            <a:endParaRPr lang="pt-BR" sz="2400" b="1" dirty="0"/>
+          </a:p>
+          <a:p>
+            <a:r>
+              <a:rPr lang="pt-BR" sz="2400" dirty="0"/>
+              <a:t>Link do Repositório do projeto no Github: </a:t>
+            </a:r>
+            <a:r>
+              <a:rPr lang="pt-BR" sz="2400" dirty="0">
+                <a:hlinkClick r:id="rId3"/>
+              </a:rPr>
+              <a:t>https://github.com/bruno88rick/wine-Quality-classification</a:t>
+            </a:r>
+            <a:r>
+              <a:rPr lang="pt-BR" sz="2400" dirty="0"/>
+              <a:t> </a:t>
+            </a:r>
+          </a:p>
+        </p:txBody>
+      </p:sp>
+    </p:spTree>
+    <p:extLst>
+      <p:ext uri="{BB962C8B-B14F-4D97-AF65-F5344CB8AC3E}">
+        <p14:creationId xmlns:p14="http://schemas.microsoft.com/office/powerpoint/2010/main" val="1261097953"/>
+      </p:ext>
+    </p:extLst>
+  </p:cSld>
+  <p:clrMapOvr>
+    <a:masterClrMapping/>
+  </p:clrMapOvr>
+</p:sld>
+</file>
+
 <file path=ppt/slides/slide2.xml><?xml version="1.0" encoding="utf-8"?>
 <p:sld xmlns:a="http://schemas.openxmlformats.org/drawingml/2006/main" xmlns:r="http://schemas.openxmlformats.org/officeDocument/2006/relationships" xmlns:p="http://schemas.openxmlformats.org/presentationml/2006/main">
   <p:cSld>
@@ -7126,6 +7411,418 @@
 </file>
 
 <file path=ppt/slides/slide4.xml><?xml version="1.0" encoding="utf-8"?>
+<p:sld xmlns:a="http://schemas.openxmlformats.org/drawingml/2006/main" xmlns:r="http://schemas.openxmlformats.org/officeDocument/2006/relationships" xmlns:p="http://schemas.openxmlformats.org/presentationml/2006/main">
+  <p:cSld>
+    <p:bg>
+      <p:bgPr>
+        <a:solidFill>
+          <a:schemeClr val="bg1">
+            <a:lumMod val="95000"/>
+          </a:schemeClr>
+        </a:solidFill>
+        <a:effectLst/>
+      </p:bgPr>
+    </p:bg>
+    <p:spTree>
+      <p:nvGrpSpPr>
+        <p:cNvPr id="1" name="">
+          <a:extLst>
+            <a:ext uri="{FF2B5EF4-FFF2-40B4-BE49-F238E27FC236}">
+              <a16:creationId xmlns:a16="http://schemas.microsoft.com/office/drawing/2014/main" id="{04B3870C-EF24-2B26-41AE-F6EC2DAC6B5F}"/>
+            </a:ext>
+          </a:extLst>
+        </p:cNvPr>
+        <p:cNvGrpSpPr/>
+        <p:nvPr/>
+      </p:nvGrpSpPr>
+      <p:grpSpPr>
+        <a:xfrm>
+          <a:off x="0" y="0"/>
+          <a:ext cx="0" cy="0"/>
+          <a:chOff x="0" y="0"/>
+          <a:chExt cx="0" cy="0"/>
+        </a:xfrm>
+      </p:grpSpPr>
+      <p:sp>
+        <p:nvSpPr>
+          <p:cNvPr id="2" name="Título 1">
+            <a:extLst>
+              <a:ext uri="{FF2B5EF4-FFF2-40B4-BE49-F238E27FC236}">
+                <a16:creationId xmlns:a16="http://schemas.microsoft.com/office/drawing/2014/main" id="{6E2C2908-DF08-FFC9-FC1A-0627EA2B70CE}"/>
+              </a:ext>
+            </a:extLst>
+          </p:cNvPr>
+          <p:cNvSpPr>
+            <a:spLocks noGrp="1"/>
+          </p:cNvSpPr>
+          <p:nvPr>
+            <p:ph type="title"/>
+          </p:nvPr>
+        </p:nvSpPr>
+        <p:spPr>
+          <a:xfrm>
+            <a:off x="804671" y="964692"/>
+            <a:ext cx="5928637" cy="1188720"/>
+          </a:xfrm>
+        </p:spPr>
+        <p:txBody>
+          <a:bodyPr>
+            <a:normAutofit/>
+          </a:bodyPr>
+          <a:lstStyle/>
+          <a:p>
+            <a:r>
+              <a:rPr lang="pt-BR"/>
+              <a:t>O que a Análise Exploratória Revelou?</a:t>
+            </a:r>
+          </a:p>
+        </p:txBody>
+      </p:sp>
+      <p:sp>
+        <p:nvSpPr>
+          <p:cNvPr id="8" name="Content Placeholder 7">
+            <a:extLst>
+              <a:ext uri="{FF2B5EF4-FFF2-40B4-BE49-F238E27FC236}">
+                <a16:creationId xmlns:a16="http://schemas.microsoft.com/office/drawing/2014/main" id="{37FDB27B-30FC-9C6D-BA22-4BB333EFAF58}"/>
+              </a:ext>
+            </a:extLst>
+          </p:cNvPr>
+          <p:cNvSpPr>
+            <a:spLocks noGrp="1"/>
+          </p:cNvSpPr>
+          <p:nvPr>
+            <p:ph idx="1"/>
+          </p:nvPr>
+        </p:nvSpPr>
+        <p:spPr>
+          <a:xfrm>
+            <a:off x="804672" y="2638044"/>
+            <a:ext cx="5925312" cy="3101983"/>
+          </a:xfrm>
+        </p:spPr>
+        <p:txBody>
+          <a:bodyPr>
+            <a:normAutofit/>
+          </a:bodyPr>
+          <a:lstStyle/>
+          <a:p>
+            <a:r>
+              <a:rPr lang="pt-BR" dirty="0"/>
+              <a:t>Teor alcoólico é o fator mais associado à qualidade: vinhos melhores tendem</a:t>
+            </a:r>
+          </a:p>
+          <a:p>
+            <a:r>
+              <a:rPr lang="en-US" dirty="0"/>
+              <a:t>a ter </a:t>
+            </a:r>
+            <a:r>
+              <a:rPr lang="en-US" dirty="0" err="1"/>
+              <a:t>mais</a:t>
+            </a:r>
+            <a:r>
+              <a:rPr lang="en-US" dirty="0"/>
+              <a:t> </a:t>
+            </a:r>
+            <a:r>
+              <a:rPr lang="en-US" dirty="0" err="1"/>
+              <a:t>álcool</a:t>
+            </a:r>
+            <a:r>
+              <a:rPr lang="en-US" dirty="0"/>
+              <a:t>.</a:t>
+            </a:r>
+            <a:endParaRPr lang="pt-BR" dirty="0"/>
+          </a:p>
+          <a:p>
+            <a:r>
+              <a:rPr lang="pt-BR" dirty="0"/>
+              <a:t>Acidez volátil tem relação inversa: excesso derruba a qualidade.</a:t>
+            </a:r>
+          </a:p>
+          <a:p>
+            <a:r>
+              <a:rPr lang="pt-BR" dirty="0"/>
+              <a:t>Sulfatos e ácido cítrico também acompanham vinhos melhor avaliados.</a:t>
+            </a:r>
+          </a:p>
+          <a:p>
+            <a:r>
+              <a:rPr lang="pt-BR" dirty="0"/>
+              <a:t>Correlações coerentes com o conhecimento enológico — dão confiança ao modelo.</a:t>
+            </a:r>
+          </a:p>
+          <a:p>
+            <a:endParaRPr lang="en-US" dirty="0"/>
+          </a:p>
+        </p:txBody>
+      </p:sp>
+      <p:sp>
+        <p:nvSpPr>
+          <p:cNvPr id="30" name="Rectangle 29">
+            <a:extLst>
+              <a:ext uri="{FF2B5EF4-FFF2-40B4-BE49-F238E27FC236}">
+                <a16:creationId xmlns:a16="http://schemas.microsoft.com/office/drawing/2014/main" id="{E3BC0364-4B58-4841-A227-00A6A59E02C6}"/>
+              </a:ext>
+              <a:ext uri="{C183D7F6-B498-43B3-948B-1728B52AA6E4}">
+                <adec:decorative xmlns:adec="http://schemas.microsoft.com/office/drawing/2017/decorative" val="1"/>
+              </a:ext>
+            </a:extLst>
+          </p:cNvPr>
+          <p:cNvSpPr>
+            <a:spLocks noGrp="1" noRot="1" noChangeAspect="1" noMove="1" noResize="1" noEditPoints="1" noAdjustHandles="1" noChangeArrowheads="1" noChangeShapeType="1" noTextEdit="1"/>
+          </p:cNvSpPr>
+          <p:nvPr>
+            <p:extLst>
+              <p:ext uri="{386F3935-93C4-4BCD-93E2-E3B085C9AB24}">
+                <p16:designElem xmlns:p16="http://schemas.microsoft.com/office/powerpoint/2015/main" val="1"/>
+              </p:ext>
+            </p:extLst>
+          </p:nvPr>
+        </p:nvSpPr>
+        <p:spPr>
+          <a:xfrm>
+            <a:off x="7534656" y="-2"/>
+            <a:ext cx="4657344" cy="6858002"/>
+          </a:xfrm>
+          <a:prstGeom prst="rect">
+            <a:avLst/>
+          </a:prstGeom>
+          <a:solidFill>
+            <a:schemeClr val="accent2"/>
+          </a:solidFill>
+          <a:ln>
+            <a:noFill/>
+          </a:ln>
+        </p:spPr>
+        <p:style>
+          <a:lnRef idx="2">
+            <a:schemeClr val="accent1">
+              <a:shade val="50000"/>
+            </a:schemeClr>
+          </a:lnRef>
+          <a:fillRef idx="1">
+            <a:schemeClr val="accent1"/>
+          </a:fillRef>
+          <a:effectRef idx="0">
+            <a:schemeClr val="accent1"/>
+          </a:effectRef>
+          <a:fontRef idx="minor">
+            <a:schemeClr val="lt1"/>
+          </a:fontRef>
+        </p:style>
+        <p:txBody>
+          <a:bodyPr rtlCol="0" anchor="ctr"/>
+          <a:lstStyle/>
+          <a:p>
+            <a:pPr algn="ctr"/>
+            <a:endParaRPr lang="en-US"/>
+          </a:p>
+        </p:txBody>
+      </p:sp>
+      <p:sp>
+        <p:nvSpPr>
+          <p:cNvPr id="32" name="Rectangle 31">
+            <a:extLst>
+              <a:ext uri="{FF2B5EF4-FFF2-40B4-BE49-F238E27FC236}">
+                <a16:creationId xmlns:a16="http://schemas.microsoft.com/office/drawing/2014/main" id="{A029A1F4-D02D-48E4-9331-6870B23B4FAF}"/>
+              </a:ext>
+              <a:ext uri="{C183D7F6-B498-43B3-948B-1728B52AA6E4}">
+                <adec:decorative xmlns:adec="http://schemas.microsoft.com/office/drawing/2017/decorative" val="1"/>
+              </a:ext>
+            </a:extLst>
+          </p:cNvPr>
+          <p:cNvSpPr>
+            <a:spLocks noGrp="1" noRot="1" noChangeAspect="1" noMove="1" noResize="1" noEditPoints="1" noAdjustHandles="1" noChangeArrowheads="1" noChangeShapeType="1" noTextEdit="1"/>
+          </p:cNvSpPr>
+          <p:nvPr>
+            <p:extLst>
+              <p:ext uri="{386F3935-93C4-4BCD-93E2-E3B085C9AB24}">
+                <p16:designElem xmlns:p16="http://schemas.microsoft.com/office/powerpoint/2015/main" val="1"/>
+              </p:ext>
+            </p:extLst>
+          </p:nvPr>
+        </p:nvSpPr>
+        <p:spPr>
+          <a:xfrm>
+            <a:off x="8020813" y="479893"/>
+            <a:ext cx="3685031" cy="5458969"/>
+          </a:xfrm>
+          <a:prstGeom prst="rect">
+            <a:avLst/>
+          </a:prstGeom>
+          <a:noFill/>
+          <a:ln w="31750" cap="sq">
+            <a:solidFill>
+              <a:srgbClr val="FFFFFF"/>
+            </a:solidFill>
+            <a:miter lim="800000"/>
+          </a:ln>
+        </p:spPr>
+        <p:style>
+          <a:lnRef idx="2">
+            <a:schemeClr val="accent1">
+              <a:shade val="50000"/>
+            </a:schemeClr>
+          </a:lnRef>
+          <a:fillRef idx="1">
+            <a:schemeClr val="accent1"/>
+          </a:fillRef>
+          <a:effectRef idx="0">
+            <a:schemeClr val="accent1"/>
+          </a:effectRef>
+          <a:fontRef idx="minor">
+            <a:schemeClr val="lt1"/>
+          </a:fontRef>
+        </p:style>
+        <p:txBody>
+          <a:bodyPr rtlCol="0" anchor="ctr"/>
+          <a:lstStyle/>
+          <a:p>
+            <a:pPr algn="ctr"/>
+            <a:endParaRPr lang="en-US" dirty="0"/>
+          </a:p>
+        </p:txBody>
+      </p:sp>
+      <p:sp>
+        <p:nvSpPr>
+          <p:cNvPr id="34" name="Rectangle 33">
+            <a:extLst>
+              <a:ext uri="{FF2B5EF4-FFF2-40B4-BE49-F238E27FC236}">
+                <a16:creationId xmlns:a16="http://schemas.microsoft.com/office/drawing/2014/main" id="{D06A8CF3-711E-4C63-9DD5-53A2696C0D6F}"/>
+              </a:ext>
+              <a:ext uri="{C183D7F6-B498-43B3-948B-1728B52AA6E4}">
+                <adec:decorative xmlns:adec="http://schemas.microsoft.com/office/drawing/2017/decorative" val="1"/>
+              </a:ext>
+            </a:extLst>
+          </p:cNvPr>
+          <p:cNvSpPr>
+            <a:spLocks noGrp="1" noRot="1" noChangeAspect="1" noMove="1" noResize="1" noEditPoints="1" noAdjustHandles="1" noChangeArrowheads="1" noChangeShapeType="1" noTextEdit="1"/>
+          </p:cNvSpPr>
+          <p:nvPr>
+            <p:extLst>
+              <p:ext uri="{386F3935-93C4-4BCD-93E2-E3B085C9AB24}">
+                <p16:designElem xmlns:p16="http://schemas.microsoft.com/office/powerpoint/2015/main" val="1"/>
+              </p:ext>
+            </p:extLst>
+          </p:nvPr>
+        </p:nvSpPr>
+        <p:spPr>
+          <a:xfrm>
+            <a:off x="8186411" y="644485"/>
+            <a:ext cx="3353835" cy="5129784"/>
+          </a:xfrm>
+          <a:prstGeom prst="rect">
+            <a:avLst/>
+          </a:prstGeom>
+          <a:solidFill>
+            <a:srgbClr val="FFFFFF"/>
+          </a:solidFill>
+          <a:ln>
+            <a:noFill/>
+          </a:ln>
+        </p:spPr>
+        <p:style>
+          <a:lnRef idx="2">
+            <a:schemeClr val="accent1">
+              <a:shade val="50000"/>
+            </a:schemeClr>
+          </a:lnRef>
+          <a:fillRef idx="1">
+            <a:schemeClr val="accent1"/>
+          </a:fillRef>
+          <a:effectRef idx="0">
+            <a:schemeClr val="accent1"/>
+          </a:effectRef>
+          <a:fontRef idx="minor">
+            <a:schemeClr val="lt1"/>
+          </a:fontRef>
+        </p:style>
+        <p:txBody>
+          <a:bodyPr rtlCol="0" anchor="ctr"/>
+          <a:lstStyle/>
+          <a:p>
+            <a:pPr algn="ctr"/>
+            <a:endParaRPr lang="en-US"/>
+          </a:p>
+        </p:txBody>
+      </p:sp>
+      <p:pic>
+        <p:nvPicPr>
+          <p:cNvPr id="9" name="Picture 5">
+            <a:extLst>
+              <a:ext uri="{FF2B5EF4-FFF2-40B4-BE49-F238E27FC236}">
+                <a16:creationId xmlns:a16="http://schemas.microsoft.com/office/drawing/2014/main" id="{DADE8F75-5AA6-F28F-2E5E-27FBF45D32B1}"/>
+              </a:ext>
+            </a:extLst>
+          </p:cNvPr>
+          <p:cNvPicPr>
+            <a:picLocks noChangeAspect="1"/>
+          </p:cNvPicPr>
+          <p:nvPr/>
+        </p:nvPicPr>
+        <p:blipFill>
+          <a:blip r:embed="rId2"/>
+          <a:srcRect t="11082" r="4" b="5"/>
+          <a:stretch>
+            <a:fillRect/>
+          </a:stretch>
+        </p:blipFill>
+        <p:spPr>
+          <a:xfrm>
+            <a:off x="8340435" y="822036"/>
+            <a:ext cx="3026664" cy="2348100"/>
+          </a:xfrm>
+          <a:prstGeom prst="rect">
+            <a:avLst/>
+          </a:prstGeom>
+        </p:spPr>
+      </p:pic>
+      <p:pic>
+        <p:nvPicPr>
+          <p:cNvPr id="7" name="Picture 4">
+            <a:extLst>
+              <a:ext uri="{FF2B5EF4-FFF2-40B4-BE49-F238E27FC236}">
+                <a16:creationId xmlns:a16="http://schemas.microsoft.com/office/drawing/2014/main" id="{25ED6B23-59C1-C480-E5F8-D041B1803126}"/>
+              </a:ext>
+            </a:extLst>
+          </p:cNvPr>
+          <p:cNvPicPr>
+            <a:picLocks noChangeAspect="1"/>
+          </p:cNvPicPr>
+          <p:nvPr/>
+        </p:nvPicPr>
+        <p:blipFill>
+          <a:blip r:embed="rId3"/>
+          <a:srcRect l="15439" r="13990" b="1"/>
+          <a:stretch>
+            <a:fillRect/>
+          </a:stretch>
+        </p:blipFill>
+        <p:spPr>
+          <a:xfrm>
+            <a:off x="8340435" y="3255097"/>
+            <a:ext cx="3026664" cy="2348100"/>
+          </a:xfrm>
+          <a:prstGeom prst="rect">
+            <a:avLst/>
+          </a:prstGeom>
+        </p:spPr>
+      </p:pic>
+    </p:spTree>
+    <p:extLst>
+      <p:ext uri="{BB962C8B-B14F-4D97-AF65-F5344CB8AC3E}">
+        <p14:creationId xmlns:p14="http://schemas.microsoft.com/office/powerpoint/2010/main" val="3053891418"/>
+      </p:ext>
+    </p:extLst>
+  </p:cSld>
+  <p:clrMapOvr>
+    <a:masterClrMapping/>
+  </p:clrMapOvr>
+</p:sld>
+</file>
+
+<file path=ppt/slides/slide5.xml><?xml version="1.0" encoding="utf-8"?>
 <p:sld xmlns:a="http://schemas.openxmlformats.org/drawingml/2006/main" xmlns:r="http://schemas.openxmlformats.org/officeDocument/2006/relationships" xmlns:p="http://schemas.openxmlformats.org/presentationml/2006/main">
   <p:cSld>
     <p:bg>
@@ -7663,7 +8360,7 @@
 </p:sld>
 </file>
 
-<file path=ppt/slides/slide5.xml><?xml version="1.0" encoding="utf-8"?>
+<file path=ppt/slides/slide6.xml><?xml version="1.0" encoding="utf-8"?>
 <p:sld xmlns:a="http://schemas.openxmlformats.org/drawingml/2006/main" xmlns:r="http://schemas.openxmlformats.org/officeDocument/2006/relationships" xmlns:p="http://schemas.openxmlformats.org/presentationml/2006/main">
   <p:cSld>
     <p:spTree>
@@ -7801,7 +8498,7 @@
 </p:sld>
 </file>
 
-<file path=ppt/slides/slide6.xml><?xml version="1.0" encoding="utf-8"?>
+<file path=ppt/slides/slide7.xml><?xml version="1.0" encoding="utf-8"?>
 <p:sld xmlns:a="http://schemas.openxmlformats.org/drawingml/2006/main" xmlns:r="http://schemas.openxmlformats.org/officeDocument/2006/relationships" xmlns:p="http://schemas.openxmlformats.org/presentationml/2006/main">
   <p:cSld>
     <p:bg>
@@ -8785,418 +9482,6 @@
 </p:sld>
 </file>
 
-<file path=ppt/slides/slide7.xml><?xml version="1.0" encoding="utf-8"?>
-<p:sld xmlns:a="http://schemas.openxmlformats.org/drawingml/2006/main" xmlns:r="http://schemas.openxmlformats.org/officeDocument/2006/relationships" xmlns:p="http://schemas.openxmlformats.org/presentationml/2006/main">
-  <p:cSld>
-    <p:bg>
-      <p:bgPr>
-        <a:solidFill>
-          <a:schemeClr val="bg1">
-            <a:lumMod val="95000"/>
-          </a:schemeClr>
-        </a:solidFill>
-        <a:effectLst/>
-      </p:bgPr>
-    </p:bg>
-    <p:spTree>
-      <p:nvGrpSpPr>
-        <p:cNvPr id="1" name="">
-          <a:extLst>
-            <a:ext uri="{FF2B5EF4-FFF2-40B4-BE49-F238E27FC236}">
-              <a16:creationId xmlns:a16="http://schemas.microsoft.com/office/drawing/2014/main" id="{04B3870C-EF24-2B26-41AE-F6EC2DAC6B5F}"/>
-            </a:ext>
-          </a:extLst>
-        </p:cNvPr>
-        <p:cNvGrpSpPr/>
-        <p:nvPr/>
-      </p:nvGrpSpPr>
-      <p:grpSpPr>
-        <a:xfrm>
-          <a:off x="0" y="0"/>
-          <a:ext cx="0" cy="0"/>
-          <a:chOff x="0" y="0"/>
-          <a:chExt cx="0" cy="0"/>
-        </a:xfrm>
-      </p:grpSpPr>
-      <p:sp>
-        <p:nvSpPr>
-          <p:cNvPr id="2" name="Título 1">
-            <a:extLst>
-              <a:ext uri="{FF2B5EF4-FFF2-40B4-BE49-F238E27FC236}">
-                <a16:creationId xmlns:a16="http://schemas.microsoft.com/office/drawing/2014/main" id="{6E2C2908-DF08-FFC9-FC1A-0627EA2B70CE}"/>
-              </a:ext>
-            </a:extLst>
-          </p:cNvPr>
-          <p:cNvSpPr>
-            <a:spLocks noGrp="1"/>
-          </p:cNvSpPr>
-          <p:nvPr>
-            <p:ph type="title"/>
-          </p:nvPr>
-        </p:nvSpPr>
-        <p:spPr>
-          <a:xfrm>
-            <a:off x="804671" y="964692"/>
-            <a:ext cx="5928637" cy="1188720"/>
-          </a:xfrm>
-        </p:spPr>
-        <p:txBody>
-          <a:bodyPr>
-            <a:normAutofit/>
-          </a:bodyPr>
-          <a:lstStyle/>
-          <a:p>
-            <a:r>
-              <a:rPr lang="pt-BR"/>
-              <a:t>O que a Análise Exploratória Revelou?</a:t>
-            </a:r>
-          </a:p>
-        </p:txBody>
-      </p:sp>
-      <p:sp>
-        <p:nvSpPr>
-          <p:cNvPr id="8" name="Content Placeholder 7">
-            <a:extLst>
-              <a:ext uri="{FF2B5EF4-FFF2-40B4-BE49-F238E27FC236}">
-                <a16:creationId xmlns:a16="http://schemas.microsoft.com/office/drawing/2014/main" id="{37FDB27B-30FC-9C6D-BA22-4BB333EFAF58}"/>
-              </a:ext>
-            </a:extLst>
-          </p:cNvPr>
-          <p:cNvSpPr>
-            <a:spLocks noGrp="1"/>
-          </p:cNvSpPr>
-          <p:nvPr>
-            <p:ph idx="1"/>
-          </p:nvPr>
-        </p:nvSpPr>
-        <p:spPr>
-          <a:xfrm>
-            <a:off x="804672" y="2638044"/>
-            <a:ext cx="5925312" cy="3101983"/>
-          </a:xfrm>
-        </p:spPr>
-        <p:txBody>
-          <a:bodyPr>
-            <a:normAutofit/>
-          </a:bodyPr>
-          <a:lstStyle/>
-          <a:p>
-            <a:r>
-              <a:rPr lang="pt-BR" dirty="0"/>
-              <a:t>Teor alcoólico é o fator mais associado à qualidade: vinhos melhores tendem</a:t>
-            </a:r>
-          </a:p>
-          <a:p>
-            <a:r>
-              <a:rPr lang="en-US" dirty="0"/>
-              <a:t>a ter </a:t>
-            </a:r>
-            <a:r>
-              <a:rPr lang="en-US" dirty="0" err="1"/>
-              <a:t>mais</a:t>
-            </a:r>
-            <a:r>
-              <a:rPr lang="en-US" dirty="0"/>
-              <a:t> </a:t>
-            </a:r>
-            <a:r>
-              <a:rPr lang="en-US" dirty="0" err="1"/>
-              <a:t>álcool</a:t>
-            </a:r>
-            <a:r>
-              <a:rPr lang="en-US" dirty="0"/>
-              <a:t>.</a:t>
-            </a:r>
-            <a:endParaRPr lang="pt-BR" dirty="0"/>
-          </a:p>
-          <a:p>
-            <a:r>
-              <a:rPr lang="pt-BR" dirty="0"/>
-              <a:t>Acidez volátil tem relação inversa: excesso derruba a qualidade.</a:t>
-            </a:r>
-          </a:p>
-          <a:p>
-            <a:r>
-              <a:rPr lang="pt-BR" dirty="0"/>
-              <a:t>Sulfatos e ácido cítrico também acompanham vinhos melhor avaliados.</a:t>
-            </a:r>
-          </a:p>
-          <a:p>
-            <a:r>
-              <a:rPr lang="pt-BR" dirty="0"/>
-              <a:t>Correlações coerentes com o conhecimento enológico — dão confiança ao modelo.</a:t>
-            </a:r>
-          </a:p>
-          <a:p>
-            <a:endParaRPr lang="en-US" dirty="0"/>
-          </a:p>
-        </p:txBody>
-      </p:sp>
-      <p:sp>
-        <p:nvSpPr>
-          <p:cNvPr id="30" name="Rectangle 29">
-            <a:extLst>
-              <a:ext uri="{FF2B5EF4-FFF2-40B4-BE49-F238E27FC236}">
-                <a16:creationId xmlns:a16="http://schemas.microsoft.com/office/drawing/2014/main" id="{E3BC0364-4B58-4841-A227-00A6A59E02C6}"/>
-              </a:ext>
-              <a:ext uri="{C183D7F6-B498-43B3-948B-1728B52AA6E4}">
-                <adec:decorative xmlns:adec="http://schemas.microsoft.com/office/drawing/2017/decorative" val="1"/>
-              </a:ext>
-            </a:extLst>
-          </p:cNvPr>
-          <p:cNvSpPr>
-            <a:spLocks noGrp="1" noRot="1" noChangeAspect="1" noMove="1" noResize="1" noEditPoints="1" noAdjustHandles="1" noChangeArrowheads="1" noChangeShapeType="1" noTextEdit="1"/>
-          </p:cNvSpPr>
-          <p:nvPr>
-            <p:extLst>
-              <p:ext uri="{386F3935-93C4-4BCD-93E2-E3B085C9AB24}">
-                <p16:designElem xmlns:p16="http://schemas.microsoft.com/office/powerpoint/2015/main" val="1"/>
-              </p:ext>
-            </p:extLst>
-          </p:nvPr>
-        </p:nvSpPr>
-        <p:spPr>
-          <a:xfrm>
-            <a:off x="7534656" y="-2"/>
-            <a:ext cx="4657344" cy="6858002"/>
-          </a:xfrm>
-          <a:prstGeom prst="rect">
-            <a:avLst/>
-          </a:prstGeom>
-          <a:solidFill>
-            <a:schemeClr val="accent2"/>
-          </a:solidFill>
-          <a:ln>
-            <a:noFill/>
-          </a:ln>
-        </p:spPr>
-        <p:style>
-          <a:lnRef idx="2">
-            <a:schemeClr val="accent1">
-              <a:shade val="50000"/>
-            </a:schemeClr>
-          </a:lnRef>
-          <a:fillRef idx="1">
-            <a:schemeClr val="accent1"/>
-          </a:fillRef>
-          <a:effectRef idx="0">
-            <a:schemeClr val="accent1"/>
-          </a:effectRef>
-          <a:fontRef idx="minor">
-            <a:schemeClr val="lt1"/>
-          </a:fontRef>
-        </p:style>
-        <p:txBody>
-          <a:bodyPr rtlCol="0" anchor="ctr"/>
-          <a:lstStyle/>
-          <a:p>
-            <a:pPr algn="ctr"/>
-            <a:endParaRPr lang="en-US"/>
-          </a:p>
-        </p:txBody>
-      </p:sp>
-      <p:sp>
-        <p:nvSpPr>
-          <p:cNvPr id="32" name="Rectangle 31">
-            <a:extLst>
-              <a:ext uri="{FF2B5EF4-FFF2-40B4-BE49-F238E27FC236}">
-                <a16:creationId xmlns:a16="http://schemas.microsoft.com/office/drawing/2014/main" id="{A029A1F4-D02D-48E4-9331-6870B23B4FAF}"/>
-              </a:ext>
-              <a:ext uri="{C183D7F6-B498-43B3-948B-1728B52AA6E4}">
-                <adec:decorative xmlns:adec="http://schemas.microsoft.com/office/drawing/2017/decorative" val="1"/>
-              </a:ext>
-            </a:extLst>
-          </p:cNvPr>
-          <p:cNvSpPr>
-            <a:spLocks noGrp="1" noRot="1" noChangeAspect="1" noMove="1" noResize="1" noEditPoints="1" noAdjustHandles="1" noChangeArrowheads="1" noChangeShapeType="1" noTextEdit="1"/>
-          </p:cNvSpPr>
-          <p:nvPr>
-            <p:extLst>
-              <p:ext uri="{386F3935-93C4-4BCD-93E2-E3B085C9AB24}">
-                <p16:designElem xmlns:p16="http://schemas.microsoft.com/office/powerpoint/2015/main" val="1"/>
-              </p:ext>
-            </p:extLst>
-          </p:nvPr>
-        </p:nvSpPr>
-        <p:spPr>
-          <a:xfrm>
-            <a:off x="8020813" y="479893"/>
-            <a:ext cx="3685031" cy="5458969"/>
-          </a:xfrm>
-          <a:prstGeom prst="rect">
-            <a:avLst/>
-          </a:prstGeom>
-          <a:noFill/>
-          <a:ln w="31750" cap="sq">
-            <a:solidFill>
-              <a:srgbClr val="FFFFFF"/>
-            </a:solidFill>
-            <a:miter lim="800000"/>
-          </a:ln>
-        </p:spPr>
-        <p:style>
-          <a:lnRef idx="2">
-            <a:schemeClr val="accent1">
-              <a:shade val="50000"/>
-            </a:schemeClr>
-          </a:lnRef>
-          <a:fillRef idx="1">
-            <a:schemeClr val="accent1"/>
-          </a:fillRef>
-          <a:effectRef idx="0">
-            <a:schemeClr val="accent1"/>
-          </a:effectRef>
-          <a:fontRef idx="minor">
-            <a:schemeClr val="lt1"/>
-          </a:fontRef>
-        </p:style>
-        <p:txBody>
-          <a:bodyPr rtlCol="0" anchor="ctr"/>
-          <a:lstStyle/>
-          <a:p>
-            <a:pPr algn="ctr"/>
-            <a:endParaRPr lang="en-US" dirty="0"/>
-          </a:p>
-        </p:txBody>
-      </p:sp>
-      <p:sp>
-        <p:nvSpPr>
-          <p:cNvPr id="34" name="Rectangle 33">
-            <a:extLst>
-              <a:ext uri="{FF2B5EF4-FFF2-40B4-BE49-F238E27FC236}">
-                <a16:creationId xmlns:a16="http://schemas.microsoft.com/office/drawing/2014/main" id="{D06A8CF3-711E-4C63-9DD5-53A2696C0D6F}"/>
-              </a:ext>
-              <a:ext uri="{C183D7F6-B498-43B3-948B-1728B52AA6E4}">
-                <adec:decorative xmlns:adec="http://schemas.microsoft.com/office/drawing/2017/decorative" val="1"/>
-              </a:ext>
-            </a:extLst>
-          </p:cNvPr>
-          <p:cNvSpPr>
-            <a:spLocks noGrp="1" noRot="1" noChangeAspect="1" noMove="1" noResize="1" noEditPoints="1" noAdjustHandles="1" noChangeArrowheads="1" noChangeShapeType="1" noTextEdit="1"/>
-          </p:cNvSpPr>
-          <p:nvPr>
-            <p:extLst>
-              <p:ext uri="{386F3935-93C4-4BCD-93E2-E3B085C9AB24}">
-                <p16:designElem xmlns:p16="http://schemas.microsoft.com/office/powerpoint/2015/main" val="1"/>
-              </p:ext>
-            </p:extLst>
-          </p:nvPr>
-        </p:nvSpPr>
-        <p:spPr>
-          <a:xfrm>
-            <a:off x="8186411" y="644485"/>
-            <a:ext cx="3353835" cy="5129784"/>
-          </a:xfrm>
-          <a:prstGeom prst="rect">
-            <a:avLst/>
-          </a:prstGeom>
-          <a:solidFill>
-            <a:srgbClr val="FFFFFF"/>
-          </a:solidFill>
-          <a:ln>
-            <a:noFill/>
-          </a:ln>
-        </p:spPr>
-        <p:style>
-          <a:lnRef idx="2">
-            <a:schemeClr val="accent1">
-              <a:shade val="50000"/>
-            </a:schemeClr>
-          </a:lnRef>
-          <a:fillRef idx="1">
-            <a:schemeClr val="accent1"/>
-          </a:fillRef>
-          <a:effectRef idx="0">
-            <a:schemeClr val="accent1"/>
-          </a:effectRef>
-          <a:fontRef idx="minor">
-            <a:schemeClr val="lt1"/>
-          </a:fontRef>
-        </p:style>
-        <p:txBody>
-          <a:bodyPr rtlCol="0" anchor="ctr"/>
-          <a:lstStyle/>
-          <a:p>
-            <a:pPr algn="ctr"/>
-            <a:endParaRPr lang="en-US"/>
-          </a:p>
-        </p:txBody>
-      </p:sp>
-      <p:pic>
-        <p:nvPicPr>
-          <p:cNvPr id="9" name="Picture 5">
-            <a:extLst>
-              <a:ext uri="{FF2B5EF4-FFF2-40B4-BE49-F238E27FC236}">
-                <a16:creationId xmlns:a16="http://schemas.microsoft.com/office/drawing/2014/main" id="{DADE8F75-5AA6-F28F-2E5E-27FBF45D32B1}"/>
-              </a:ext>
-            </a:extLst>
-          </p:cNvPr>
-          <p:cNvPicPr>
-            <a:picLocks noChangeAspect="1"/>
-          </p:cNvPicPr>
-          <p:nvPr/>
-        </p:nvPicPr>
-        <p:blipFill>
-          <a:blip r:embed="rId2"/>
-          <a:srcRect t="11082" r="4" b="5"/>
-          <a:stretch>
-            <a:fillRect/>
-          </a:stretch>
-        </p:blipFill>
-        <p:spPr>
-          <a:xfrm>
-            <a:off x="8340435" y="822036"/>
-            <a:ext cx="3026664" cy="2348100"/>
-          </a:xfrm>
-          <a:prstGeom prst="rect">
-            <a:avLst/>
-          </a:prstGeom>
-        </p:spPr>
-      </p:pic>
-      <p:pic>
-        <p:nvPicPr>
-          <p:cNvPr id="7" name="Picture 4">
-            <a:extLst>
-              <a:ext uri="{FF2B5EF4-FFF2-40B4-BE49-F238E27FC236}">
-                <a16:creationId xmlns:a16="http://schemas.microsoft.com/office/drawing/2014/main" id="{25ED6B23-59C1-C480-E5F8-D041B1803126}"/>
-              </a:ext>
-            </a:extLst>
-          </p:cNvPr>
-          <p:cNvPicPr>
-            <a:picLocks noChangeAspect="1"/>
-          </p:cNvPicPr>
-          <p:nvPr/>
-        </p:nvPicPr>
-        <p:blipFill>
-          <a:blip r:embed="rId3"/>
-          <a:srcRect l="15439" r="13990" b="1"/>
-          <a:stretch>
-            <a:fillRect/>
-          </a:stretch>
-        </p:blipFill>
-        <p:spPr>
-          <a:xfrm>
-            <a:off x="8340435" y="3255097"/>
-            <a:ext cx="3026664" cy="2348100"/>
-          </a:xfrm>
-          <a:prstGeom prst="rect">
-            <a:avLst/>
-          </a:prstGeom>
-        </p:spPr>
-      </p:pic>
-    </p:spTree>
-    <p:extLst>
-      <p:ext uri="{BB962C8B-B14F-4D97-AF65-F5344CB8AC3E}">
-        <p14:creationId xmlns:p14="http://schemas.microsoft.com/office/powerpoint/2010/main" val="3053891418"/>
-      </p:ext>
-    </p:extLst>
-  </p:cSld>
-  <p:clrMapOvr>
-    <a:masterClrMapping/>
-  </p:clrMapOvr>
-</p:sld>
-</file>
-
 <file path=ppt/slides/slide8.xml><?xml version="1.0" encoding="utf-8"?>
 <p:sld xmlns:a="http://schemas.openxmlformats.org/drawingml/2006/main" xmlns:r="http://schemas.openxmlformats.org/officeDocument/2006/relationships" xmlns:p="http://schemas.openxmlformats.org/presentationml/2006/main">
   <p:cSld>
